--- a/MyOwnPresentations/pptx/Greedy_Algorithms_IV.pptx
+++ b/MyOwnPresentations/pptx/Greedy_Algorithms_IV.pptx
@@ -134,6 +134,11 @@
       </a:defRPr>
     </a:lvl9pPr>
   </p:defaultTextStyle>
+  <p:extLst>
+    <p:ext uri="{EFAFB233-063F-42B5-8137-9DF3F51BA10A}">
+      <p15:sldGuideLst xmlns:p15="http://schemas.microsoft.com/office/powerpoint/2012/main"/>
+    </p:ext>
+  </p:extLst>
 </p:presentation>
 </file>
 
@@ -9041,7 +9046,7 @@
           <a:p>
             <a:fld id="{9FD077AA-7B72-45EF-AE31-6B742BA0D4D1}" type="datetimeFigureOut">
               <a:rPr lang="en-US" smtClean="0"/>
-              <a:t>8/31/2025</a:t>
+              <a:t>2/28/2026</a:t>
             </a:fld>
             <a:endParaRPr lang="en-US"/>
           </a:p>
@@ -9239,7 +9244,7 @@
           <a:p>
             <a:fld id="{9FD077AA-7B72-45EF-AE31-6B742BA0D4D1}" type="datetimeFigureOut">
               <a:rPr lang="en-US" smtClean="0"/>
-              <a:t>8/31/2025</a:t>
+              <a:t>2/28/2026</a:t>
             </a:fld>
             <a:endParaRPr lang="en-US"/>
           </a:p>
@@ -9447,7 +9452,7 @@
           <a:p>
             <a:fld id="{9FD077AA-7B72-45EF-AE31-6B742BA0D4D1}" type="datetimeFigureOut">
               <a:rPr lang="en-US" smtClean="0"/>
-              <a:t>8/31/2025</a:t>
+              <a:t>2/28/2026</a:t>
             </a:fld>
             <a:endParaRPr lang="en-US"/>
           </a:p>
@@ -9667,7 +9672,7 @@
           <a:p>
             <a:fld id="{5C041930-F8FC-4542-827E-E504F4750562}" type="datetimeFigureOut">
               <a:rPr lang="en-US" smtClean="0"/>
-              <a:t>8/31/2025</a:t>
+              <a:t>2/28/2026</a:t>
             </a:fld>
             <a:endParaRPr lang="en-US"/>
           </a:p>
@@ -9865,7 +9870,7 @@
           <a:p>
             <a:fld id="{5C041930-F8FC-4542-827E-E504F4750562}" type="datetimeFigureOut">
               <a:rPr lang="en-US" smtClean="0"/>
-              <a:t>8/31/2025</a:t>
+              <a:t>2/28/2026</a:t>
             </a:fld>
             <a:endParaRPr lang="en-US"/>
           </a:p>
@@ -10140,7 +10145,7 @@
           <a:p>
             <a:fld id="{5C041930-F8FC-4542-827E-E504F4750562}" type="datetimeFigureOut">
               <a:rPr lang="en-US" smtClean="0"/>
-              <a:t>8/31/2025</a:t>
+              <a:t>2/28/2026</a:t>
             </a:fld>
             <a:endParaRPr lang="en-US"/>
           </a:p>
@@ -10405,7 +10410,7 @@
           <a:p>
             <a:fld id="{5C041930-F8FC-4542-827E-E504F4750562}" type="datetimeFigureOut">
               <a:rPr lang="en-US" smtClean="0"/>
-              <a:t>8/31/2025</a:t>
+              <a:t>2/28/2026</a:t>
             </a:fld>
             <a:endParaRPr lang="en-US"/>
           </a:p>
@@ -10817,7 +10822,7 @@
           <a:p>
             <a:fld id="{5C041930-F8FC-4542-827E-E504F4750562}" type="datetimeFigureOut">
               <a:rPr lang="en-US" smtClean="0"/>
-              <a:t>8/31/2025</a:t>
+              <a:t>2/28/2026</a:t>
             </a:fld>
             <a:endParaRPr lang="en-US"/>
           </a:p>
@@ -10958,7 +10963,7 @@
           <a:p>
             <a:fld id="{5C041930-F8FC-4542-827E-E504F4750562}" type="datetimeFigureOut">
               <a:rPr lang="en-US" smtClean="0"/>
-              <a:t>8/31/2025</a:t>
+              <a:t>2/28/2026</a:t>
             </a:fld>
             <a:endParaRPr lang="en-US"/>
           </a:p>
@@ -11071,7 +11076,7 @@
           <a:p>
             <a:fld id="{5C041930-F8FC-4542-827E-E504F4750562}" type="datetimeFigureOut">
               <a:rPr lang="en-US" smtClean="0"/>
-              <a:t>8/31/2025</a:t>
+              <a:t>2/28/2026</a:t>
             </a:fld>
             <a:endParaRPr lang="en-US"/>
           </a:p>
@@ -11382,7 +11387,7 @@
           <a:p>
             <a:fld id="{5C041930-F8FC-4542-827E-E504F4750562}" type="datetimeFigureOut">
               <a:rPr lang="en-US" smtClean="0"/>
-              <a:t>8/31/2025</a:t>
+              <a:t>2/28/2026</a:t>
             </a:fld>
             <a:endParaRPr lang="en-US"/>
           </a:p>
@@ -11580,7 +11585,7 @@
           <a:p>
             <a:fld id="{9FD077AA-7B72-45EF-AE31-6B742BA0D4D1}" type="datetimeFigureOut">
               <a:rPr lang="en-US" smtClean="0"/>
-              <a:t>8/31/2025</a:t>
+              <a:t>2/28/2026</a:t>
             </a:fld>
             <a:endParaRPr lang="en-US"/>
           </a:p>
@@ -11868,7 +11873,7 @@
           <a:p>
             <a:fld id="{5C041930-F8FC-4542-827E-E504F4750562}" type="datetimeFigureOut">
               <a:rPr lang="en-US" smtClean="0"/>
-              <a:t>8/31/2025</a:t>
+              <a:t>2/28/2026</a:t>
             </a:fld>
             <a:endParaRPr lang="en-US"/>
           </a:p>
@@ -12066,7 +12071,7 @@
           <a:p>
             <a:fld id="{5C041930-F8FC-4542-827E-E504F4750562}" type="datetimeFigureOut">
               <a:rPr lang="en-US" smtClean="0"/>
-              <a:t>8/31/2025</a:t>
+              <a:t>2/28/2026</a:t>
             </a:fld>
             <a:endParaRPr lang="en-US"/>
           </a:p>
@@ -12274,7 +12279,7 @@
           <a:p>
             <a:fld id="{5C041930-F8FC-4542-827E-E504F4750562}" type="datetimeFigureOut">
               <a:rPr lang="en-US" smtClean="0"/>
-              <a:t>8/31/2025</a:t>
+              <a:t>2/28/2026</a:t>
             </a:fld>
             <a:endParaRPr lang="en-US"/>
           </a:p>
@@ -12549,7 +12554,7 @@
           <a:p>
             <a:fld id="{9FD077AA-7B72-45EF-AE31-6B742BA0D4D1}" type="datetimeFigureOut">
               <a:rPr lang="en-US" smtClean="0"/>
-              <a:t>8/31/2025</a:t>
+              <a:t>2/28/2026</a:t>
             </a:fld>
             <a:endParaRPr lang="en-US"/>
           </a:p>
@@ -12814,7 +12819,7 @@
           <a:p>
             <a:fld id="{9FD077AA-7B72-45EF-AE31-6B742BA0D4D1}" type="datetimeFigureOut">
               <a:rPr lang="en-US" smtClean="0"/>
-              <a:t>8/31/2025</a:t>
+              <a:t>2/28/2026</a:t>
             </a:fld>
             <a:endParaRPr lang="en-US"/>
           </a:p>
@@ -13226,7 +13231,7 @@
           <a:p>
             <a:fld id="{9FD077AA-7B72-45EF-AE31-6B742BA0D4D1}" type="datetimeFigureOut">
               <a:rPr lang="en-US" smtClean="0"/>
-              <a:t>8/31/2025</a:t>
+              <a:t>2/28/2026</a:t>
             </a:fld>
             <a:endParaRPr lang="en-US"/>
           </a:p>
@@ -13367,7 +13372,7 @@
           <a:p>
             <a:fld id="{9FD077AA-7B72-45EF-AE31-6B742BA0D4D1}" type="datetimeFigureOut">
               <a:rPr lang="en-US" smtClean="0"/>
-              <a:t>8/31/2025</a:t>
+              <a:t>2/28/2026</a:t>
             </a:fld>
             <a:endParaRPr lang="en-US"/>
           </a:p>
@@ -13480,7 +13485,7 @@
           <a:p>
             <a:fld id="{9FD077AA-7B72-45EF-AE31-6B742BA0D4D1}" type="datetimeFigureOut">
               <a:rPr lang="en-US" smtClean="0"/>
-              <a:t>8/31/2025</a:t>
+              <a:t>2/28/2026</a:t>
             </a:fld>
             <a:endParaRPr lang="en-US"/>
           </a:p>
@@ -13791,7 +13796,7 @@
           <a:p>
             <a:fld id="{9FD077AA-7B72-45EF-AE31-6B742BA0D4D1}" type="datetimeFigureOut">
               <a:rPr lang="en-US" smtClean="0"/>
-              <a:t>8/31/2025</a:t>
+              <a:t>2/28/2026</a:t>
             </a:fld>
             <a:endParaRPr lang="en-US"/>
           </a:p>
@@ -14079,7 +14084,7 @@
           <a:p>
             <a:fld id="{9FD077AA-7B72-45EF-AE31-6B742BA0D4D1}" type="datetimeFigureOut">
               <a:rPr lang="en-US" smtClean="0"/>
-              <a:t>8/31/2025</a:t>
+              <a:t>2/28/2026</a:t>
             </a:fld>
             <a:endParaRPr lang="en-US"/>
           </a:p>
@@ -14320,7 +14325,7 @@
           <a:p>
             <a:fld id="{9FD077AA-7B72-45EF-AE31-6B742BA0D4D1}" type="datetimeFigureOut">
               <a:rPr lang="en-US" smtClean="0"/>
-              <a:t>8/31/2025</a:t>
+              <a:t>2/28/2026</a:t>
             </a:fld>
             <a:endParaRPr lang="en-US"/>
           </a:p>
@@ -14888,7 +14893,7 @@
           <a:p>
             <a:fld id="{5C041930-F8FC-4542-827E-E504F4750562}" type="datetimeFigureOut">
               <a:rPr lang="en-US" smtClean="0"/>
-              <a:t>8/31/2025</a:t>
+              <a:t>2/28/2026</a:t>
             </a:fld>
             <a:endParaRPr lang="en-US"/>
           </a:p>
@@ -15828,7 +15833,23 @@
                   <a:srgbClr val="FFFFFF"/>
                 </a:solidFill>
               </a:rPr>
-              <a:t>2025/26. Autumn Semester</a:t>
+              <a:t>2025/26. </a:t>
+            </a:r>
+            <a:r>
+              <a:rPr lang="en-US">
+                <a:solidFill>
+                  <a:srgbClr val="FFFFFF"/>
+                </a:solidFill>
+              </a:rPr>
+              <a:t>Spring </a:t>
+            </a:r>
+            <a:r>
+              <a:rPr lang="en-US" dirty="0">
+                <a:solidFill>
+                  <a:srgbClr val="FFFFFF"/>
+                </a:solidFill>
+              </a:rPr>
+              <a:t>Semester</a:t>
             </a:r>
           </a:p>
           <a:p>
@@ -17491,93 +17512,93 @@
           <a:custGeom>
             <a:avLst/>
             <a:gdLst>
-              <a:gd name="connsiteX0" fmla="*/ 0 w 4242816"/>
-              <a:gd name="connsiteY0" fmla="*/ 0 h 18288"/>
-              <a:gd name="connsiteX1" fmla="*/ 690973 w 4242816"/>
-              <a:gd name="connsiteY1" fmla="*/ 0 h 18288"/>
-              <a:gd name="connsiteX2" fmla="*/ 1212233 w 4242816"/>
-              <a:gd name="connsiteY2" fmla="*/ 0 h 18288"/>
-              <a:gd name="connsiteX3" fmla="*/ 1860778 w 4242816"/>
-              <a:gd name="connsiteY3" fmla="*/ 0 h 18288"/>
-              <a:gd name="connsiteX4" fmla="*/ 2424466 w 4242816"/>
-              <a:gd name="connsiteY4" fmla="*/ 0 h 18288"/>
-              <a:gd name="connsiteX5" fmla="*/ 3115439 w 4242816"/>
-              <a:gd name="connsiteY5" fmla="*/ 0 h 18288"/>
-              <a:gd name="connsiteX6" fmla="*/ 3636699 w 4242816"/>
-              <a:gd name="connsiteY6" fmla="*/ 0 h 18288"/>
-              <a:gd name="connsiteX7" fmla="*/ 4242816 w 4242816"/>
-              <a:gd name="connsiteY7" fmla="*/ 0 h 18288"/>
-              <a:gd name="connsiteX8" fmla="*/ 4242816 w 4242816"/>
-              <a:gd name="connsiteY8" fmla="*/ 18288 h 18288"/>
-              <a:gd name="connsiteX9" fmla="*/ 3636699 w 4242816"/>
-              <a:gd name="connsiteY9" fmla="*/ 18288 h 18288"/>
-              <a:gd name="connsiteX10" fmla="*/ 3030583 w 4242816"/>
-              <a:gd name="connsiteY10" fmla="*/ 18288 h 18288"/>
-              <a:gd name="connsiteX11" fmla="*/ 2466894 w 4242816"/>
-              <a:gd name="connsiteY11" fmla="*/ 18288 h 18288"/>
-              <a:gd name="connsiteX12" fmla="*/ 1988062 w 4242816"/>
-              <a:gd name="connsiteY12" fmla="*/ 18288 h 18288"/>
-              <a:gd name="connsiteX13" fmla="*/ 1466802 w 4242816"/>
-              <a:gd name="connsiteY13" fmla="*/ 18288 h 18288"/>
-              <a:gd name="connsiteX14" fmla="*/ 860686 w 4242816"/>
-              <a:gd name="connsiteY14" fmla="*/ 18288 h 18288"/>
-              <a:gd name="connsiteX15" fmla="*/ 0 w 4242816"/>
-              <a:gd name="connsiteY15" fmla="*/ 18288 h 18288"/>
-              <a:gd name="connsiteX16" fmla="*/ 0 w 4242816"/>
-              <a:gd name="connsiteY16" fmla="*/ 0 h 18288"/>
+              <a:gd name="csX0" fmla="*/ 0 w 4242816"/>
+              <a:gd name="csY0" fmla="*/ 0 h 18288"/>
+              <a:gd name="csX1" fmla="*/ 690973 w 4242816"/>
+              <a:gd name="csY1" fmla="*/ 0 h 18288"/>
+              <a:gd name="csX2" fmla="*/ 1212233 w 4242816"/>
+              <a:gd name="csY2" fmla="*/ 0 h 18288"/>
+              <a:gd name="csX3" fmla="*/ 1860778 w 4242816"/>
+              <a:gd name="csY3" fmla="*/ 0 h 18288"/>
+              <a:gd name="csX4" fmla="*/ 2424466 w 4242816"/>
+              <a:gd name="csY4" fmla="*/ 0 h 18288"/>
+              <a:gd name="csX5" fmla="*/ 3115439 w 4242816"/>
+              <a:gd name="csY5" fmla="*/ 0 h 18288"/>
+              <a:gd name="csX6" fmla="*/ 3636699 w 4242816"/>
+              <a:gd name="csY6" fmla="*/ 0 h 18288"/>
+              <a:gd name="csX7" fmla="*/ 4242816 w 4242816"/>
+              <a:gd name="csY7" fmla="*/ 0 h 18288"/>
+              <a:gd name="csX8" fmla="*/ 4242816 w 4242816"/>
+              <a:gd name="csY8" fmla="*/ 18288 h 18288"/>
+              <a:gd name="csX9" fmla="*/ 3636699 w 4242816"/>
+              <a:gd name="csY9" fmla="*/ 18288 h 18288"/>
+              <a:gd name="csX10" fmla="*/ 3030583 w 4242816"/>
+              <a:gd name="csY10" fmla="*/ 18288 h 18288"/>
+              <a:gd name="csX11" fmla="*/ 2466894 w 4242816"/>
+              <a:gd name="csY11" fmla="*/ 18288 h 18288"/>
+              <a:gd name="csX12" fmla="*/ 1988062 w 4242816"/>
+              <a:gd name="csY12" fmla="*/ 18288 h 18288"/>
+              <a:gd name="csX13" fmla="*/ 1466802 w 4242816"/>
+              <a:gd name="csY13" fmla="*/ 18288 h 18288"/>
+              <a:gd name="csX14" fmla="*/ 860686 w 4242816"/>
+              <a:gd name="csY14" fmla="*/ 18288 h 18288"/>
+              <a:gd name="csX15" fmla="*/ 0 w 4242816"/>
+              <a:gd name="csY15" fmla="*/ 18288 h 18288"/>
+              <a:gd name="csX16" fmla="*/ 0 w 4242816"/>
+              <a:gd name="csY16" fmla="*/ 0 h 18288"/>
             </a:gdLst>
             <a:ahLst/>
             <a:cxnLst>
               <a:cxn ang="0">
-                <a:pos x="connsiteX0" y="connsiteY0"/>
+                <a:pos x="csX0" y="csY0"/>
               </a:cxn>
               <a:cxn ang="0">
-                <a:pos x="connsiteX1" y="connsiteY1"/>
+                <a:pos x="csX1" y="csY1"/>
               </a:cxn>
               <a:cxn ang="0">
-                <a:pos x="connsiteX2" y="connsiteY2"/>
+                <a:pos x="csX2" y="csY2"/>
               </a:cxn>
               <a:cxn ang="0">
-                <a:pos x="connsiteX3" y="connsiteY3"/>
+                <a:pos x="csX3" y="csY3"/>
               </a:cxn>
               <a:cxn ang="0">
-                <a:pos x="connsiteX4" y="connsiteY4"/>
+                <a:pos x="csX4" y="csY4"/>
               </a:cxn>
               <a:cxn ang="0">
-                <a:pos x="connsiteX5" y="connsiteY5"/>
+                <a:pos x="csX5" y="csY5"/>
               </a:cxn>
               <a:cxn ang="0">
-                <a:pos x="connsiteX6" y="connsiteY6"/>
+                <a:pos x="csX6" y="csY6"/>
               </a:cxn>
               <a:cxn ang="0">
-                <a:pos x="connsiteX7" y="connsiteY7"/>
+                <a:pos x="csX7" y="csY7"/>
               </a:cxn>
               <a:cxn ang="0">
-                <a:pos x="connsiteX8" y="connsiteY8"/>
+                <a:pos x="csX8" y="csY8"/>
               </a:cxn>
               <a:cxn ang="0">
-                <a:pos x="connsiteX9" y="connsiteY9"/>
+                <a:pos x="csX9" y="csY9"/>
               </a:cxn>
               <a:cxn ang="0">
-                <a:pos x="connsiteX10" y="connsiteY10"/>
+                <a:pos x="csX10" y="csY10"/>
               </a:cxn>
               <a:cxn ang="0">
-                <a:pos x="connsiteX11" y="connsiteY11"/>
+                <a:pos x="csX11" y="csY11"/>
               </a:cxn>
               <a:cxn ang="0">
-                <a:pos x="connsiteX12" y="connsiteY12"/>
+                <a:pos x="csX12" y="csY12"/>
               </a:cxn>
               <a:cxn ang="0">
-                <a:pos x="connsiteX13" y="connsiteY13"/>
+                <a:pos x="csX13" y="csY13"/>
               </a:cxn>
               <a:cxn ang="0">
-                <a:pos x="connsiteX14" y="connsiteY14"/>
+                <a:pos x="csX14" y="csY14"/>
               </a:cxn>
               <a:cxn ang="0">
-                <a:pos x="connsiteX15" y="connsiteY15"/>
+                <a:pos x="csX15" y="csY15"/>
               </a:cxn>
               <a:cxn ang="0">
-                <a:pos x="connsiteX16" y="connsiteY16"/>
+                <a:pos x="csX16" y="csY16"/>
               </a:cxn>
             </a:cxnLst>
             <a:rect l="l" t="t" r="r" b="b"/>
@@ -18368,8 +18389,8 @@
           </a:p>
         </p:txBody>
       </p:sp>
-      <mc:AlternateContent xmlns:mc="http://schemas.openxmlformats.org/markup-compatibility/2006">
-        <mc:Choice xmlns:a14="http://schemas.microsoft.com/office/drawing/2010/main" Requires="a14">
+      <mc:AlternateContent xmlns:mc="http://schemas.openxmlformats.org/markup-compatibility/2006" xmlns:a14="http://schemas.microsoft.com/office/drawing/2010/main">
+        <mc:Choice Requires="a14">
           <p:sp>
             <p:nvSpPr>
               <p:cNvPr id="3" name="Content Placeholder 2">
@@ -18479,7 +18500,7 @@
             </p:txBody>
           </p:sp>
         </mc:Choice>
-        <mc:Fallback>
+        <mc:Fallback xmlns="">
           <p:sp>
             <p:nvSpPr>
               <p:cNvPr id="3" name="Content Placeholder 2">
